--- a/decks/triple-electromagnetism/triple-electromagnetism_ch1_magnets-fields.pptx
+++ b/decks/triple-electromagnetism/triple-electromagnetism_ch1_magnets-fields.pptx
@@ -126,30 +126,30 @@
   <p:extLst>
     <p:ext uri="{521415D9-36F7-43E2-AB2F-B90AF26B5E84}">
       <p14:sectionLst xmlns:p14="http://schemas.microsoft.com/office/powerpoint/2010/main">
-        <p14:section name="Opening" id="{d7b35e49-c3c8-1694-9f71-e2fb9a8d21bb}">
+        <p14:section name="Opening" id="{d4fd85b2-d52b-8a81-94a1-99ce2e5b6a5e}">
           <p14:sldIdLst>
             <p14:sldId id="256"/>
           </p14:sldIdLst>
         </p14:section>
-        <p14:section name="Gate" id="{e253b231-2e5d-3df3-c604-8e7f0c7a7568}">
+        <p14:section name="Gate" id="{d1ec7ab2-287f-3fa4-2269-a3b3c8b3299f}">
           <p14:sldIdLst>
             <p14:sldId id="257"/>
             <p14:sldId id="258"/>
           </p14:sldIdLst>
         </p14:section>
-        <p14:section name="Pre-teach" id="{e6df29c1-af39-a057-c442-f0b145e28991}">
+        <p14:section name="Pre-teach" id="{b87b27ec-05b6-90cf-175e-31d46bd30e0a}">
           <p14:sldIdLst>
             <p14:sldId id="259"/>
             <p14:sldId id="260"/>
           </p14:sldIdLst>
         </p14:section>
-        <p14:section name="Read-along" id="{0ebf22c1-e01f-322d-d165-a5d33309d327}">
+        <p14:section name="Read-along" id="{784b6673-ea7c-8b2f-dc31-7ee4ae6fc072}">
           <p14:sldIdLst>
             <p14:sldId id="261"/>
             <p14:sldId id="262"/>
           </p14:sldIdLst>
         </p14:section>
-        <p14:section name="Teach" id="{38af279c-f42c-c5e0-b2b6-9b3b339214e4}">
+        <p14:section name="Teach" id="{987cc5a4-d0fa-5517-ce5a-ff47a129da43}">
           <p14:sldIdLst>
             <p14:sldId id="263"/>
             <p14:sldId id="264"/>
@@ -158,7 +158,7 @@
             <p14:sldId id="267"/>
           </p14:sldIdLst>
         </p14:section>
-        <p14:section name="Routes" id="{958a0563-2687-c164-e4f6-abf133a6ffec}">
+        <p14:section name="Routes" id="{5bb4f378-3df2-130f-a7ed-10885b3d1a0c}">
           <p14:sldIdLst>
             <p14:sldId id="268"/>
             <p14:sldId id="269"/>
@@ -166,12 +166,12 @@
             <p14:sldId id="271"/>
           </p14:sldIdLst>
         </p14:section>
-        <p14:section name="Close" id="{846a08b5-c5c4-3a91-d6ad-39a01389e047}">
+        <p14:section name="Close" id="{d476b5cd-7486-45b2-6927-a50ad542431e}">
           <p14:sldIdLst>
             <p14:sldId id="272"/>
           </p14:sldIdLst>
         </p14:section>
-        <p14:section name="Answers" id="{222f2a18-5a2a-dfb3-3b97-b05be4210222}">
+        <p14:section name="Answers" id="{900172c7-d947-04d8-18da-13580a94efff}">
           <p14:sldIdLst>
             <p14:sldId id="273"/>
             <p14:sldId id="274"/>
@@ -1603,7 +1603,7 @@
               <a:t>Do now — retrieval. Silent, no notes, no help: recall comes before any support. Give about four minutes.
 1. What happens when the north pole of one magnet is brought near the north pole of another?  →  A   They repel
 2. A piece of iron that becomes a magnet only while it is in another magnetic field is called an ___ magnet.  →  induced
-3. Where is the magnetic field of a bar magnet strongest?  →  A   At the poles
+3. Where is the magnetic field of a bar magnet strongest?  →  B   At the poles
 Circulate: who gets 3/3 (Stretch route), 2/3 (Core), 0–1 (Support)? Use this to route pupils later in the lesson.</a:t>
             </a:r>
             <a:endParaRPr lang="en-US" dirty="0"/>
@@ -1786,7 +1786,7 @@
               <a:t>Answers — pupils mark their own in a different colour, then hands up for 3/3, 2/3, 1/3.
 1. A   They repel. Like poles repel. Only unlike poles (north and south) attract.
 2. induced. Induced magnetism is temporary: it lasts only while the material is in the field.
-3. A   At the poles. The field lines are closest together at the poles, which is where the field is strongest. It gets weaker with distance.
+3. B   At the poles. The field lines are closest together at the poles, which is where the field is strongest. It gets weaker with distance.
 Say the route each score points to: 3/3 Stretch, 2/3 Core, 0–1 Support. Pupils may choose to move up.</a:t>
             </a:r>
             <a:endParaRPr lang="en-US" dirty="0"/>
@@ -6265,7 +6265,7 @@
                 <a:ea typeface="Calibri" pitchFamily="34" charset="-122"/>
                 <a:cs typeface="Calibri" pitchFamily="34" charset="-120"/>
               </a:rPr>
-              <a:t>The second paperclip is a permanent magnet</a:t>
+              <a:t>The two paperclips repel each other, which holds them together</a:t>
             </a:r>
             <a:endParaRPr lang="en-US" sz="2600" dirty="0"/>
           </a:p>
@@ -6302,7 +6302,7 @@
                 <a:ea typeface="Calibri" pitchFamily="34" charset="-122"/>
                 <a:cs typeface="Calibri" pitchFamily="34" charset="-120"/>
               </a:rPr>
-              <a:t>Steel is sticky when it is near a magnet</a:t>
+              <a:t>The second paperclip is a permanent magnet</a:t>
             </a:r>
             <a:endParaRPr lang="en-US" sz="2600" dirty="0"/>
           </a:p>
@@ -6339,7 +6339,7 @@
                 <a:ea typeface="Calibri" pitchFamily="34" charset="-122"/>
                 <a:cs typeface="Calibri" pitchFamily="34" charset="-120"/>
               </a:rPr>
-              <a:t>The two paperclips repel each other, which holds them together</a:t>
+              <a:t>Steel is sticky when it is near a magnet</a:t>
             </a:r>
             <a:endParaRPr lang="en-US" sz="2600" dirty="0"/>
           </a:p>
@@ -10060,7 +10060,7 @@
                 <a:ea typeface="Calibri" pitchFamily="34" charset="-122"/>
                 <a:cs typeface="Calibri" pitchFamily="34" charset="-120"/>
               </a:rPr>
-              <a:t>They attract</a:t>
+              <a:t>Nothing: poles only act on iron</a:t>
             </a:r>
             <a:endParaRPr lang="en-US" sz="2400" dirty="0"/>
           </a:p>
@@ -10097,7 +10097,7 @@
                 <a:ea typeface="Calibri" pitchFamily="34" charset="-122"/>
                 <a:cs typeface="Calibri" pitchFamily="34" charset="-120"/>
               </a:rPr>
-              <a:t>Nothing: poles only act on iron</a:t>
+              <a:t>They swap poles</a:t>
             </a:r>
             <a:endParaRPr lang="en-US" sz="2400" dirty="0"/>
           </a:p>
@@ -10134,7 +10134,7 @@
                 <a:ea typeface="Calibri" pitchFamily="34" charset="-122"/>
                 <a:cs typeface="Calibri" pitchFamily="34" charset="-120"/>
               </a:rPr>
-              <a:t>They swap poles</a:t>
+              <a:t>They attract</a:t>
             </a:r>
             <a:endParaRPr lang="en-US" sz="2400" dirty="0"/>
           </a:p>
@@ -11717,7 +11717,7 @@
                 <a:ea typeface="Calibri" pitchFamily="34" charset="-122"/>
                 <a:cs typeface="Calibri" pitchFamily="34" charset="-120"/>
               </a:rPr>
-              <a:t>They attract</a:t>
+              <a:t>Nothing: poles only act on iron</a:t>
             </a:r>
             <a:endParaRPr lang="en-US" sz="2000" dirty="0"/>
           </a:p>
@@ -11754,7 +11754,7 @@
                 <a:ea typeface="Calibri" pitchFamily="34" charset="-122"/>
                 <a:cs typeface="Calibri" pitchFamily="34" charset="-120"/>
               </a:rPr>
-              <a:t>Nothing: poles only act on iron</a:t>
+              <a:t>They swap poles</a:t>
             </a:r>
             <a:endParaRPr lang="en-US" sz="2000" dirty="0"/>
           </a:p>
@@ -11791,7 +11791,7 @@
                 <a:ea typeface="Calibri" pitchFamily="34" charset="-122"/>
                 <a:cs typeface="Calibri" pitchFamily="34" charset="-120"/>
               </a:rPr>
-              <a:t>They swap poles</a:t>
+              <a:t>They attract</a:t>
             </a:r>
             <a:endParaRPr lang="en-US" sz="2000" dirty="0"/>
           </a:p>
@@ -12193,7 +12193,7 @@
                 <a:ea typeface="Calibri" pitchFamily="34" charset="-122"/>
                 <a:cs typeface="Calibri" pitchFamily="34" charset="-120"/>
               </a:rPr>
-              <a:t>At the poles</a:t>
+              <a:t>In the middle of the magnet</a:t>
             </a:r>
             <a:endParaRPr lang="en-US" sz="2000" dirty="0"/>
           </a:p>
@@ -12230,7 +12230,7 @@
                 <a:ea typeface="Calibri" pitchFamily="34" charset="-122"/>
                 <a:cs typeface="Calibri" pitchFamily="34" charset="-120"/>
               </a:rPr>
-              <a:t>In the middle of the magnet</a:t>
+              <a:t>At the poles</a:t>
             </a:r>
             <a:endParaRPr lang="en-US" sz="2000" dirty="0"/>
           </a:p>
@@ -12267,7 +12267,7 @@
                 <a:ea typeface="Calibri" pitchFamily="34" charset="-122"/>
                 <a:cs typeface="Calibri" pitchFamily="34" charset="-120"/>
               </a:rPr>
-              <a:t>About 10 cm away from it</a:t>
+              <a:t>It is the same strength everywhere</a:t>
             </a:r>
             <a:endParaRPr lang="en-US" sz="2000" dirty="0"/>
           </a:p>
@@ -12304,7 +12304,7 @@
                 <a:ea typeface="Calibri" pitchFamily="34" charset="-122"/>
                 <a:cs typeface="Calibri" pitchFamily="34" charset="-120"/>
               </a:rPr>
-              <a:t>It is the same strength everywhere</a:t>
+              <a:t>About 10 cm away from it</a:t>
             </a:r>
             <a:endParaRPr lang="en-US" sz="2000" dirty="0"/>
           </a:p>
@@ -13664,7 +13664,7 @@
                 <a:ea typeface="Calibri" pitchFamily="34" charset="-122"/>
                 <a:cs typeface="Calibri" pitchFamily="34" charset="-120"/>
               </a:rPr>
-              <a:t>A   At the poles</a:t>
+              <a:t>B   At the poles</a:t>
             </a:r>
             <a:endParaRPr lang="en-US" sz="2200" dirty="0"/>
           </a:p>

--- a/decks/triple-electromagnetism/triple-electromagnetism_ch1_magnets-fields.pptx
+++ b/decks/triple-electromagnetism/triple-electromagnetism_ch1_magnets-fields.pptx
@@ -126,30 +126,30 @@
   <p:extLst>
     <p:ext uri="{521415D9-36F7-43E2-AB2F-B90AF26B5E84}">
       <p14:sectionLst xmlns:p14="http://schemas.microsoft.com/office/powerpoint/2010/main">
-        <p14:section name="Opening" id="{d4fd85b2-d52b-8a81-94a1-99ce2e5b6a5e}">
+        <p14:section name="Opening" id="{0e3e2dbc-a7bb-a684-dbca-575f26198205}">
           <p14:sldIdLst>
             <p14:sldId id="256"/>
           </p14:sldIdLst>
         </p14:section>
-        <p14:section name="Gate" id="{d1ec7ab2-287f-3fa4-2269-a3b3c8b3299f}">
+        <p14:section name="Gate" id="{733b4a44-bfd3-5e70-b6dc-f6f40593a6f4}">
           <p14:sldIdLst>
             <p14:sldId id="257"/>
             <p14:sldId id="258"/>
           </p14:sldIdLst>
         </p14:section>
-        <p14:section name="Pre-teach" id="{b87b27ec-05b6-90cf-175e-31d46bd30e0a}">
+        <p14:section name="Pre-teach" id="{7d1bc68d-d83a-9dba-07c5-2a4f4a70fa63}">
           <p14:sldIdLst>
             <p14:sldId id="259"/>
             <p14:sldId id="260"/>
           </p14:sldIdLst>
         </p14:section>
-        <p14:section name="Read-along" id="{784b6673-ea7c-8b2f-dc31-7ee4ae6fc072}">
+        <p14:section name="Read-along" id="{f108dcd7-2386-9f42-929e-8b8afa6075cc}">
           <p14:sldIdLst>
             <p14:sldId id="261"/>
             <p14:sldId id="262"/>
           </p14:sldIdLst>
         </p14:section>
-        <p14:section name="Teach" id="{987cc5a4-d0fa-5517-ce5a-ff47a129da43}">
+        <p14:section name="Teach" id="{659e2fc2-265c-a4a8-ee36-7776bf7a0b68}">
           <p14:sldIdLst>
             <p14:sldId id="263"/>
             <p14:sldId id="264"/>
@@ -158,7 +158,7 @@
             <p14:sldId id="267"/>
           </p14:sldIdLst>
         </p14:section>
-        <p14:section name="Routes" id="{5bb4f378-3df2-130f-a7ed-10885b3d1a0c}">
+        <p14:section name="Routes" id="{42beef1b-265e-d401-5df6-68cda46a9603}">
           <p14:sldIdLst>
             <p14:sldId id="268"/>
             <p14:sldId id="269"/>
@@ -166,12 +166,12 @@
             <p14:sldId id="271"/>
           </p14:sldIdLst>
         </p14:section>
-        <p14:section name="Close" id="{d476b5cd-7486-45b2-6927-a50ad542431e}">
+        <p14:section name="Close" id="{a48ddb0f-89b3-9235-a1b6-7cc739dbb0f3}">
           <p14:sldIdLst>
             <p14:sldId id="272"/>
           </p14:sldIdLst>
         </p14:section>
-        <p14:section name="Answers" id="{900172c7-d947-04d8-18da-13580a94efff}">
+        <p14:section name="Answers" id="{69c676b5-63f7-b4c0-7573-07cf19af5215}">
           <p14:sldIdLst>
             <p14:sldId id="273"/>
             <p14:sldId id="274"/>
